--- a/classes/parte-13-seguridad-movil-iot-e-inalambrica/265-ingenieria-inversa-de-aplicaciones-moviles/clase-265-presentacion.pptx
+++ b/classes/parte-13-seguridad-movil-iot-e-inalambrica/265-ingenieria-inversa-de-aplicaciones-moviles/clase-265-presentacion.pptx
@@ -17,6 +17,9 @@
     <p:sldId id="265" r:id="rId16"/>
     <p:sldId id="266" r:id="rId17"/>
     <p:sldId id="267" r:id="rId18"/>
+    <p:sldId id="268" r:id="rId19"/>
+    <p:sldId id="269" r:id="rId20"/>
+    <p:sldId id="270" r:id="rId21"/>
   </p:sldIdLst>
   <p:sldSz cx="9144000" cy="6858000" type="screen4x3"/>
   <p:notesSz cx="6858000" cy="9144000"/>
@@ -3198,7 +3201,7 @@
                   <a:srgbClr val="0B3D2E"/>
                 </a:solidFill>
               </a:rPr>
-              <a:t>⚠️ Errores comunes</a:t>
+              <a:t>✍️ Ejercicios</a:t>
             </a:r>
           </a:p>
         </p:txBody>
@@ -3236,67 +3239,82 @@
                   <a:srgbClr val="22282E"/>
                 </a:solidFill>
               </a:rPr>
-              <a:t>•  jadx muestra // decompilation failed — Ofuscación agresiva; recurre a smali o análisis dinámico</a:t>
-            </a:r>
-          </a:p>
-          <a:p>
-            <a:pPr>
-              <a:spcAft>
-                <a:spcPts val="600"/>
-              </a:spcAft>
-            </a:pPr>
-            <a:r>
-              <a:rPr sz="1500">
-                <a:solidFill>
-                  <a:srgbClr val="22282E"/>
-                </a:solidFill>
-              </a:rPr>
-              <a:t>•  Frida no engancha la función — Nombre/firma mal escritos o cargada tarde; usa frida-trace para descubrir símbolos</a:t>
-            </a:r>
-          </a:p>
-          <a:p>
-            <a:pPr>
-              <a:spcAft>
-                <a:spcPts val="600"/>
-              </a:spcAft>
-            </a:pPr>
-            <a:r>
-              <a:rPr sz="1500">
-                <a:solidFill>
-                  <a:srgbClr val="22282E"/>
-                </a:solidFill>
-              </a:rPr>
-              <a:t>•  App reempaquetada no instala — No está firmada o firma inválida; fírmala con apksigner</a:t>
-            </a:r>
-          </a:p>
-          <a:p>
-            <a:pPr>
-              <a:spcAft>
-                <a:spcPts val="600"/>
-              </a:spcAft>
-            </a:pPr>
-            <a:r>
-              <a:rPr sz="1500">
-                <a:solidFill>
-                  <a:srgbClr val="22282E"/>
-                </a:solidFill>
-              </a:rPr>
-              <a:t>•  App detecta el parche — Anti-tampering activo; evádelo con un hook antes de parchear</a:t>
-            </a:r>
-          </a:p>
-          <a:p>
-            <a:pPr>
-              <a:spcAft>
-                <a:spcPts val="600"/>
-              </a:spcAft>
-            </a:pPr>
-            <a:r>
-              <a:rPr sz="1500">
-                <a:solidFill>
-                  <a:srgbClr val="22282E"/>
-                </a:solidFill>
-              </a:rPr>
-              <a:t>•  Ghidra no reconoce el .so — Arquitectura equivocada; selecciona el binario ARM correcto</a:t>
+              <a:t>•  Resuelve un CrackMe de Android recuperando el secreto solo con análisis estático.</a:t>
+            </a:r>
+          </a:p>
+          <a:p>
+            <a:pPr>
+              <a:spcAft>
+                <a:spcPts val="600"/>
+              </a:spcAft>
+            </a:pPr>
+            <a:r>
+              <a:rPr sz="1500">
+                <a:solidFill>
+                  <a:srgbClr val="22282E"/>
+                </a:solidFill>
+              </a:rPr>
+              <a:t>•  Escribe un script Frida que imprima los argumentos de una función de cifrado.</a:t>
+            </a:r>
+          </a:p>
+          <a:p>
+            <a:pPr>
+              <a:spcAft>
+                <a:spcPts val="600"/>
+              </a:spcAft>
+            </a:pPr>
+            <a:r>
+              <a:rPr sz="1500">
+                <a:solidFill>
+                  <a:srgbClr val="22282E"/>
+                </a:solidFill>
+              </a:rPr>
+              <a:t>•  Localiza en Ghidra una función nativa y renómbrala/anota según su propósito.</a:t>
+            </a:r>
+          </a:p>
+          <a:p>
+            <a:pPr>
+              <a:spcAft>
+                <a:spcPts val="600"/>
+              </a:spcAft>
+            </a:pPr>
+            <a:r>
+              <a:rPr sz="1500">
+                <a:solidFill>
+                  <a:srgbClr val="22282E"/>
+                </a:solidFill>
+              </a:rPr>
+              <a:t>•  Evade un check de detección de debugger con un hook.</a:t>
+            </a:r>
+          </a:p>
+          <a:p>
+            <a:pPr>
+              <a:spcAft>
+                <a:spcPts val="600"/>
+              </a:spcAft>
+            </a:pPr>
+            <a:r>
+              <a:rPr sz="1500">
+                <a:solidFill>
+                  <a:srgbClr val="22282E"/>
+                </a:solidFill>
+              </a:rPr>
+              <a:t>•  Parchea una condición en smali y demuestra el nuevo comportamiento.</a:t>
+            </a:r>
+          </a:p>
+          <a:p>
+            <a:pPr>
+              <a:spcAft>
+                <a:spcPts val="600"/>
+              </a:spcAft>
+            </a:pPr>
+            <a:r>
+              <a:rPr sz="1500">
+                <a:solidFill>
+                  <a:srgbClr val="22282E"/>
+                </a:solidFill>
+              </a:rPr>
+              <a:t>•  Compara el esfuerzo de resolver el reto por vía estática vs. dinámica.</a:t>
             </a:r>
           </a:p>
         </p:txBody>
@@ -3347,7 +3365,7 @@
                   <a:srgbClr val="0B3D2E"/>
                 </a:solidFill>
               </a:rPr>
-              <a:t>❓ Preguntas frecuentes</a:t>
+              <a:t>📝 Reto verificable</a:t>
             </a:r>
           </a:p>
         </p:txBody>
@@ -3385,82 +3403,7 @@
                   <a:srgbClr val="22282E"/>
                 </a:solidFill>
               </a:rPr>
-              <a:t>•  ❓ ¿Estático o dinámico: cuál uso primero?</a:t>
-            </a:r>
-          </a:p>
-          <a:p>
-            <a:pPr>
-              <a:spcAft>
-                <a:spcPts val="600"/>
-              </a:spcAft>
-            </a:pPr>
-            <a:r>
-              <a:rPr sz="1500">
-                <a:solidFill>
-                  <a:srgbClr val="22282E"/>
-                </a:solidFill>
-              </a:rPr>
-              <a:t>•  Suelen combinarse. El estático da el mapa general; el dinámico confirma comportamiento y sortea ofuscación de cadenas y control de flujo.</a:t>
-            </a:r>
-          </a:p>
-          <a:p>
-            <a:pPr>
-              <a:spcAft>
-                <a:spcPts val="600"/>
-              </a:spcAft>
-            </a:pPr>
-            <a:r>
-              <a:rPr sz="1500">
-                <a:solidFill>
-                  <a:srgbClr val="22282E"/>
-                </a:solidFill>
-              </a:rPr>
-              <a:t>•  ❓ ¿La ofuscación hace imposible el RE?</a:t>
-            </a:r>
-          </a:p>
-          <a:p>
-            <a:pPr>
-              <a:spcAft>
-                <a:spcPts val="600"/>
-              </a:spcAft>
-            </a:pPr>
-            <a:r>
-              <a:rPr sz="1500">
-                <a:solidFill>
-                  <a:srgbClr val="22282E"/>
-                </a:solidFill>
-              </a:rPr>
-              <a:t>•  No. Aumenta el tiempo y la dificultad, pero el código debe ejecutarse en el dispositivo, así que la instrumentación dinámica siempre observa el comportamiento real.</a:t>
-            </a:r>
-          </a:p>
-          <a:p>
-            <a:pPr>
-              <a:spcAft>
-                <a:spcPts val="600"/>
-              </a:spcAft>
-            </a:pPr>
-            <a:r>
-              <a:rPr sz="1500">
-                <a:solidFill>
-                  <a:srgbClr val="22282E"/>
-                </a:solidFill>
-              </a:rPr>
-              <a:t>•  ❓ ¿Por qué el .so requiere Ghidra y el DEX no?</a:t>
-            </a:r>
-          </a:p>
-          <a:p>
-            <a:pPr>
-              <a:spcAft>
-                <a:spcPts val="600"/>
-              </a:spcAft>
-            </a:pPr>
-            <a:r>
-              <a:rPr sz="1500">
-                <a:solidFill>
-                  <a:srgbClr val="22282E"/>
-                </a:solidFill>
-              </a:rPr>
-              <a:t>•  El DEX es bytecode de alto nivel decompilable casi a Java; el .so es código máquina ARM/x86 que necesita un decompilador de binarios nativos como Ghidra.</a:t>
+              <a:t>•  Toma un CrackMe móvil y recupera su secreto/flag por dos vías independientes: una estática (leyendo/parcheando el código) y una dinámica (hook con Frida). Criterio de aceptación: documentas ambos…</a:t>
             </a:r>
           </a:p>
         </p:txBody>
@@ -3511,7 +3454,7 @@
                   <a:srgbClr val="0B3D2E"/>
                 </a:solidFill>
               </a:rPr>
-              <a:t>🔗 Referencias</a:t>
+              <a:t>⚠️ Errores comunes</a:t>
             </a:r>
           </a:p>
         </p:txBody>
@@ -3549,6 +3492,319 @@
                   <a:srgbClr val="22282E"/>
                 </a:solidFill>
               </a:rPr>
+              <a:t>•  jadx muestra // decompilation failed — Ofuscación agresiva; recurre a smali o análisis dinámico</a:t>
+            </a:r>
+          </a:p>
+          <a:p>
+            <a:pPr>
+              <a:spcAft>
+                <a:spcPts val="600"/>
+              </a:spcAft>
+            </a:pPr>
+            <a:r>
+              <a:rPr sz="1500">
+                <a:solidFill>
+                  <a:srgbClr val="22282E"/>
+                </a:solidFill>
+              </a:rPr>
+              <a:t>•  Frida no engancha la función — Nombre/firma mal escritos o cargada tarde; usa frida-trace para descubrir símbolos</a:t>
+            </a:r>
+          </a:p>
+          <a:p>
+            <a:pPr>
+              <a:spcAft>
+                <a:spcPts val="600"/>
+              </a:spcAft>
+            </a:pPr>
+            <a:r>
+              <a:rPr sz="1500">
+                <a:solidFill>
+                  <a:srgbClr val="22282E"/>
+                </a:solidFill>
+              </a:rPr>
+              <a:t>•  App reempaquetada no instala — No está firmada o firma inválida; fírmala con apksigner</a:t>
+            </a:r>
+          </a:p>
+          <a:p>
+            <a:pPr>
+              <a:spcAft>
+                <a:spcPts val="600"/>
+              </a:spcAft>
+            </a:pPr>
+            <a:r>
+              <a:rPr sz="1500">
+                <a:solidFill>
+                  <a:srgbClr val="22282E"/>
+                </a:solidFill>
+              </a:rPr>
+              <a:t>•  App detecta el parche — Anti-tampering activo; evádelo con un hook antes de parchear</a:t>
+            </a:r>
+          </a:p>
+          <a:p>
+            <a:pPr>
+              <a:spcAft>
+                <a:spcPts val="600"/>
+              </a:spcAft>
+            </a:pPr>
+            <a:r>
+              <a:rPr sz="1500">
+                <a:solidFill>
+                  <a:srgbClr val="22282E"/>
+                </a:solidFill>
+              </a:rPr>
+              <a:t>•  Ghidra no reconoce el .so — Arquitectura equivocada; selecciona el binario ARM correcto</a:t>
+            </a:r>
+          </a:p>
+        </p:txBody>
+      </p:sp>
+    </p:spTree>
+  </p:cSld>
+  <p:clrMapOvr>
+    <a:masterClrMapping/>
+  </p:clrMapOvr>
+</p:sld>
+</file>
+
+<file path=ppt/slides/slide13.xml><?xml version="1.0" encoding="utf-8"?>
+<p:sld xmlns:a="http://schemas.openxmlformats.org/drawingml/2006/main" xmlns:p="http://schemas.openxmlformats.org/presentationml/2006/main" xmlns:r="http://schemas.openxmlformats.org/officeDocument/2006/relationships">
+  <p:cSld>
+    <p:spTree>
+      <p:nvGrpSpPr>
+        <p:cNvPr id="1" name=""/>
+        <p:cNvGrpSpPr/>
+        <p:nvPr/>
+      </p:nvGrpSpPr>
+      <p:grpSpPr/>
+      <p:sp>
+        <p:nvSpPr>
+          <p:cNvPr id="2" name="TextBox 1"/>
+          <p:cNvSpPr txBox="1"/>
+          <p:nvPr/>
+        </p:nvSpPr>
+        <p:spPr>
+          <a:xfrm>
+            <a:off x="457200" y="320040"/>
+            <a:ext cx="8229600" cy="822960"/>
+          </a:xfrm>
+          <a:prstGeom prst="rect">
+            <a:avLst/>
+          </a:prstGeom>
+          <a:noFill/>
+        </p:spPr>
+        <p:txBody>
+          <a:bodyPr wrap="square">
+            <a:spAutoFit/>
+          </a:bodyPr>
+          <a:lstStyle/>
+          <a:p>
+            <a:r>
+              <a:rPr sz="2600" b="1">
+                <a:solidFill>
+                  <a:srgbClr val="0B3D2E"/>
+                </a:solidFill>
+              </a:rPr>
+              <a:t>❓ Preguntas frecuentes</a:t>
+            </a:r>
+          </a:p>
+        </p:txBody>
+      </p:sp>
+      <p:sp>
+        <p:nvSpPr>
+          <p:cNvPr id="3" name="TextBox 2"/>
+          <p:cNvSpPr txBox="1"/>
+          <p:nvPr/>
+        </p:nvSpPr>
+        <p:spPr>
+          <a:xfrm>
+            <a:off x="457200" y="1280160"/>
+            <a:ext cx="8229600" cy="4937760"/>
+          </a:xfrm>
+          <a:prstGeom prst="rect">
+            <a:avLst/>
+          </a:prstGeom>
+          <a:noFill/>
+        </p:spPr>
+        <p:txBody>
+          <a:bodyPr wrap="square">
+            <a:spAutoFit/>
+          </a:bodyPr>
+          <a:lstStyle/>
+          <a:p>
+            <a:pPr>
+              <a:spcAft>
+                <a:spcPts val="600"/>
+              </a:spcAft>
+            </a:pPr>
+            <a:r>
+              <a:rPr sz="1500">
+                <a:solidFill>
+                  <a:srgbClr val="22282E"/>
+                </a:solidFill>
+              </a:rPr>
+              <a:t>•  ❓ ¿Estático o dinámico: cuál uso primero?</a:t>
+            </a:r>
+          </a:p>
+          <a:p>
+            <a:pPr>
+              <a:spcAft>
+                <a:spcPts val="600"/>
+              </a:spcAft>
+            </a:pPr>
+            <a:r>
+              <a:rPr sz="1500">
+                <a:solidFill>
+                  <a:srgbClr val="22282E"/>
+                </a:solidFill>
+              </a:rPr>
+              <a:t>•  Suelen combinarse. El estático da el mapa general; el dinámico confirma comportamiento y sortea ofuscación de cadenas y control de flujo.</a:t>
+            </a:r>
+          </a:p>
+          <a:p>
+            <a:pPr>
+              <a:spcAft>
+                <a:spcPts val="600"/>
+              </a:spcAft>
+            </a:pPr>
+            <a:r>
+              <a:rPr sz="1500">
+                <a:solidFill>
+                  <a:srgbClr val="22282E"/>
+                </a:solidFill>
+              </a:rPr>
+              <a:t>•  ❓ ¿La ofuscación hace imposible el RE?</a:t>
+            </a:r>
+          </a:p>
+          <a:p>
+            <a:pPr>
+              <a:spcAft>
+                <a:spcPts val="600"/>
+              </a:spcAft>
+            </a:pPr>
+            <a:r>
+              <a:rPr sz="1500">
+                <a:solidFill>
+                  <a:srgbClr val="22282E"/>
+                </a:solidFill>
+              </a:rPr>
+              <a:t>•  No. Aumenta tiempo y dificultad. La instrumentación puede observar ejecuciones concretas, pero no garantiza cubrir todas las rutas y puede alterar comportamiento; se combina con análisis estático y…</a:t>
+            </a:r>
+          </a:p>
+          <a:p>
+            <a:pPr>
+              <a:spcAft>
+                <a:spcPts val="600"/>
+              </a:spcAft>
+            </a:pPr>
+            <a:r>
+              <a:rPr sz="1500">
+                <a:solidFill>
+                  <a:srgbClr val="22282E"/>
+                </a:solidFill>
+              </a:rPr>
+              <a:t>•  ❓ ¿Por qué el .so requiere Ghidra y el DEX no?</a:t>
+            </a:r>
+          </a:p>
+          <a:p>
+            <a:pPr>
+              <a:spcAft>
+                <a:spcPts val="600"/>
+              </a:spcAft>
+            </a:pPr>
+            <a:r>
+              <a:rPr sz="1500">
+                <a:solidFill>
+                  <a:srgbClr val="22282E"/>
+                </a:solidFill>
+              </a:rPr>
+              <a:t>•  El DEX es bytecode de alto nivel decompilable casi a Java; el .so es código máquina ARM/x86 que necesita un decompilador de binarios nativos como Ghidra.</a:t>
+            </a:r>
+          </a:p>
+        </p:txBody>
+      </p:sp>
+    </p:spTree>
+  </p:cSld>
+  <p:clrMapOvr>
+    <a:masterClrMapping/>
+  </p:clrMapOvr>
+</p:sld>
+</file>
+
+<file path=ppt/slides/slide14.xml><?xml version="1.0" encoding="utf-8"?>
+<p:sld xmlns:a="http://schemas.openxmlformats.org/drawingml/2006/main" xmlns:p="http://schemas.openxmlformats.org/presentationml/2006/main" xmlns:r="http://schemas.openxmlformats.org/officeDocument/2006/relationships">
+  <p:cSld>
+    <p:spTree>
+      <p:nvGrpSpPr>
+        <p:cNvPr id="1" name=""/>
+        <p:cNvGrpSpPr/>
+        <p:nvPr/>
+      </p:nvGrpSpPr>
+      <p:grpSpPr/>
+      <p:sp>
+        <p:nvSpPr>
+          <p:cNvPr id="2" name="TextBox 1"/>
+          <p:cNvSpPr txBox="1"/>
+          <p:nvPr/>
+        </p:nvSpPr>
+        <p:spPr>
+          <a:xfrm>
+            <a:off x="457200" y="320040"/>
+            <a:ext cx="8229600" cy="822960"/>
+          </a:xfrm>
+          <a:prstGeom prst="rect">
+            <a:avLst/>
+          </a:prstGeom>
+          <a:noFill/>
+        </p:spPr>
+        <p:txBody>
+          <a:bodyPr wrap="square">
+            <a:spAutoFit/>
+          </a:bodyPr>
+          <a:lstStyle/>
+          <a:p>
+            <a:r>
+              <a:rPr sz="2600" b="1">
+                <a:solidFill>
+                  <a:srgbClr val="0B3D2E"/>
+                </a:solidFill>
+              </a:rPr>
+              <a:t>🔗 Referencias</a:t>
+            </a:r>
+          </a:p>
+        </p:txBody>
+      </p:sp>
+      <p:sp>
+        <p:nvSpPr>
+          <p:cNvPr id="3" name="TextBox 2"/>
+          <p:cNvSpPr txBox="1"/>
+          <p:nvPr/>
+        </p:nvSpPr>
+        <p:spPr>
+          <a:xfrm>
+            <a:off x="457200" y="1280160"/>
+            <a:ext cx="8229600" cy="4937760"/>
+          </a:xfrm>
+          <a:prstGeom prst="rect">
+            <a:avLst/>
+          </a:prstGeom>
+          <a:noFill/>
+        </p:spPr>
+        <p:txBody>
+          <a:bodyPr wrap="square">
+            <a:spAutoFit/>
+          </a:bodyPr>
+          <a:lstStyle/>
+          <a:p>
+            <a:pPr>
+              <a:spcAft>
+                <a:spcPts val="600"/>
+              </a:spcAft>
+            </a:pPr>
+            <a:r>
+              <a:rPr sz="1500">
+                <a:solidFill>
+                  <a:srgbClr val="22282E"/>
+                </a:solidFill>
+              </a:rPr>
               <a:t>•  Ghidra: &lt;https://ghidra-sre.org/&gt;</a:t>
             </a:r>
           </a:p>
@@ -3599,6 +3855,81 @@
           </a:p>
         </p:txBody>
       </p:sp>
+    </p:spTree>
+  </p:cSld>
+  <p:clrMapOvr>
+    <a:masterClrMapping/>
+  </p:clrMapOvr>
+</p:sld>
+</file>
+
+<file path=ppt/slides/slide15.xml><?xml version="1.0" encoding="utf-8"?>
+<p:sld xmlns:a="http://schemas.openxmlformats.org/drawingml/2006/main" xmlns:p="http://schemas.openxmlformats.org/presentationml/2006/main" xmlns:r="http://schemas.openxmlformats.org/officeDocument/2006/relationships">
+  <p:cSld>
+    <p:spTree>
+      <p:nvGrpSpPr>
+        <p:cNvPr id="1" name=""/>
+        <p:cNvGrpSpPr/>
+        <p:nvPr/>
+      </p:nvGrpSpPr>
+      <p:grpSpPr/>
+      <p:sp>
+        <p:nvSpPr>
+          <p:cNvPr id="2" name="TextBox 1"/>
+          <p:cNvSpPr txBox="1"/>
+          <p:nvPr/>
+        </p:nvSpPr>
+        <p:spPr>
+          <a:xfrm>
+            <a:off x="457200" y="274320"/>
+            <a:ext cx="8229600" cy="640080"/>
+          </a:xfrm>
+          <a:prstGeom prst="rect">
+            <a:avLst/>
+          </a:prstGeom>
+          <a:noFill/>
+        </p:spPr>
+        <p:txBody>
+          <a:bodyPr wrap="square">
+            <a:spAutoFit/>
+          </a:bodyPr>
+          <a:lstStyle/>
+          <a:p>
+            <a:r>
+              <a:rPr sz="2200" b="1">
+                <a:solidFill>
+                  <a:srgbClr val="0B3D2E"/>
+                </a:solidFill>
+              </a:rPr>
+              <a:t>Diagrama de la clase</a:t>
+            </a:r>
+          </a:p>
+        </p:txBody>
+      </p:sp>
+      <p:pic>
+        <p:nvPicPr>
+          <p:cNvPr id="3" name="Picture 2" descr="cc81dd2717f00e8e.png"/>
+          <p:cNvPicPr>
+            <a:picLocks noChangeAspect="1"/>
+          </p:cNvPicPr>
+          <p:nvPr/>
+        </p:nvPicPr>
+        <p:blipFill>
+          <a:blip r:embed="rId2"/>
+          <a:stretch>
+            <a:fillRect/>
+          </a:stretch>
+        </p:blipFill>
+        <p:spPr>
+          <a:xfrm>
+            <a:off x="457200" y="3163824"/>
+            <a:ext cx="8229600" cy="1170432"/>
+          </a:xfrm>
+          <a:prstGeom prst="rect">
+            <a:avLst/>
+          </a:prstGeom>
+        </p:spPr>
+      </p:pic>
     </p:spTree>
   </p:cSld>
   <p:clrMapOvr>
@@ -3683,7 +4014,7 @@
                   <a:srgbClr val="22282E"/>
                 </a:solidFill>
               </a:rPr>
-              <a:t>•  Dominar la ingeniería inversa (RE) de aplicaciones móviles combinando análisis estático (desensamblado y decompilación de bytecode/nativo) con análisis dinámico (instrumentación con Frida). El alumno recuperará la lógica de una app, entenderá algoritmos ofuscados, localizará y evadirá controles anti-tampering, y parcheará una app para modificar su comportamiento en laboratorio.</a:t>
+              <a:t>•  Dominar la ingeniería inversa (RE) de aplicaciones móviles combinando análisis estático (desensamblado y decompilación de bytecode/nativo) con análisis dinámico (instrumentación con Frida). El alumno…</a:t>
             </a:r>
           </a:p>
         </p:txBody>
@@ -4092,7 +4423,7 @@
                   <a:srgbClr val="0B3D2E"/>
                 </a:solidFill>
               </a:rPr>
-              <a:t>📖 Definiciones y características</a:t>
+              <a:t>🧠 Explicación en profundidad</a:t>
             </a:r>
           </a:p>
         </p:txBody>
@@ -4130,82 +4461,52 @@
                   <a:srgbClr val="22282E"/>
                 </a:solidFill>
               </a:rPr>
-              <a:t>•  DEX (Dalvik Executable): bytecode de Android; se desensambla a smali y se decompila a Java aproximado. Característica: legible con jadx.</a:t>
-            </a:r>
-          </a:p>
-          <a:p>
-            <a:pPr>
-              <a:spcAft>
-                <a:spcPts val="600"/>
-              </a:spcAft>
-            </a:pPr>
-            <a:r>
-              <a:rPr sz="1500">
-                <a:solidFill>
-                  <a:srgbClr val="22282E"/>
-                </a:solidFill>
-              </a:rPr>
-              <a:t>•  Ghidra: suite de RE de la NSA para binarios nativos con decompilador a C. Característica: gratuita y potente para ARM/.so/Mach-O.</a:t>
-            </a:r>
-          </a:p>
-          <a:p>
-            <a:pPr>
-              <a:spcAft>
-                <a:spcPts val="600"/>
-              </a:spcAft>
-            </a:pPr>
-            <a:r>
-              <a:rPr sz="1500">
-                <a:solidFill>
-                  <a:srgbClr val="22282E"/>
-                </a:solidFill>
-              </a:rPr>
-              <a:t>•  frida-trace: genera handlers automáticos para funciones y registra sus llamadas. Característica: descubre el flujo sin leer todo el código.</a:t>
-            </a:r>
-          </a:p>
-          <a:p>
-            <a:pPr>
-              <a:spcAft>
-                <a:spcPts val="600"/>
-              </a:spcAft>
-            </a:pPr>
-            <a:r>
-              <a:rPr sz="1500">
-                <a:solidFill>
-                  <a:srgbClr val="22282E"/>
-                </a:solidFill>
-              </a:rPr>
-              <a:t>•  Ofuscación: transformación que dificulta la lectura (renombrado, control-flow flattening, cadenas cifradas). Característica: aumenta el coste, no lo impide.</a:t>
-            </a:r>
-          </a:p>
-          <a:p>
-            <a:pPr>
-              <a:spcAft>
-                <a:spcPts val="600"/>
-              </a:spcAft>
-            </a:pPr>
-            <a:r>
-              <a:rPr sz="1500">
-                <a:solidFill>
-                  <a:srgbClr val="22282E"/>
-                </a:solidFill>
-              </a:rPr>
-              <a:t>•  Anti-tampering: comprobaciones de integridad (firma, checksums) que detectan modificación. Característica: se evaden hookeando el check.</a:t>
-            </a:r>
-          </a:p>
-          <a:p>
-            <a:pPr>
-              <a:spcAft>
-                <a:spcPts val="600"/>
-              </a:spcAft>
-            </a:pPr>
-            <a:r>
-              <a:rPr sz="1500">
-                <a:solidFill>
-                  <a:srgbClr val="22282E"/>
-                </a:solidFill>
-              </a:rPr>
-              <a:t>•  Reempaquetado: recompilar una app modificada y volver a firmarla. Característica: requiere una clave de firma propia.</a:t>
+              <a:t>•  En Android, APK contiene manifiesto, recursos, DEX y posiblemente bibliotecas ELF; en iOS, el bundle contiene Mach-O, recursos y metadatos. Descompilar produce una aproximación, no el fuente…</a:t>
+            </a:r>
+          </a:p>
+          <a:p>
+            <a:pPr>
+              <a:spcAft>
+                <a:spcPts val="600"/>
+              </a:spcAft>
+            </a:pPr>
+            <a:r>
+              <a:rPr sz="1500">
+                <a:solidFill>
+                  <a:srgbClr val="22282E"/>
+                </a:solidFill>
+              </a:rPr>
+              <a:t>•  Se comienza por puntos de entrada y flujos de datos, no por leer cada función. Strings, URLs, APIs criptográficas y llamadas nativas orientan; referencias cruzadas revelan quién usa un valor. JNI o…</a:t>
+            </a:r>
+          </a:p>
+          <a:p>
+            <a:pPr>
+              <a:spcAft>
+                <a:spcPts val="600"/>
+              </a:spcAft>
+            </a:pPr>
+            <a:r>
+              <a:rPr sz="1500">
+                <a:solidFill>
+                  <a:srgbClr val="22282E"/>
+                </a:solidFill>
+              </a:rPr>
+              <a:t>•  La ofuscación eleva coste y reduce señales; no reemplaza proteger secretos ni autorizar en servidor. Reempaquetar una app propia sirve para comprender firma e integridad. Distribuir una app…</a:t>
+            </a:r>
+          </a:p>
+          <a:p>
+            <a:pPr>
+              <a:spcAft>
+                <a:spcPts val="600"/>
+              </a:spcAft>
+            </a:pPr>
+            <a:r>
+              <a:rPr sz="1500">
+                <a:solidFill>
+                  <a:srgbClr val="22282E"/>
+                </a:solidFill>
+              </a:rPr>
+              <a:t>•  JADX muestra una constante llamada APIKEY. La traza revela que identifica el cliente ante un servicio público y que toda operación sensible requiere token por usuario. Se reporta exposición de…</a:t>
             </a:r>
           </a:p>
         </p:txBody>
@@ -4256,7 +4557,7 @@
                   <a:srgbClr val="0B3D2E"/>
                 </a:solidFill>
               </a:rPr>
-              <a:t>🧰 Herramientas y preparación</a:t>
+              <a:t>📔 Glosario operativo</a:t>
             </a:r>
           </a:p>
         </p:txBody>
@@ -4294,82 +4595,82 @@
                   <a:srgbClr val="22282E"/>
                 </a:solidFill>
               </a:rPr>
-              <a:t>•  apktool d app.apk -o out           # smali + recursos</a:t>
-            </a:r>
-          </a:p>
-          <a:p>
-            <a:pPr>
-              <a:spcAft>
-                <a:spcPts val="600"/>
-              </a:spcAft>
-            </a:pPr>
-            <a:r>
-              <a:rPr sz="1500">
-                <a:solidFill>
-                  <a:srgbClr val="22282E"/>
-                </a:solidFill>
-              </a:rPr>
-              <a:t>•  jadx-gui app.apk                    # decompilación a Java</a:t>
-            </a:r>
-          </a:p>
-          <a:p>
-            <a:pPr>
-              <a:spcAft>
-                <a:spcPts val="600"/>
-              </a:spcAft>
-            </a:pPr>
-            <a:r>
-              <a:rPr sz="1500">
-                <a:solidFill>
-                  <a:srgbClr val="22282E"/>
-                </a:solidFill>
-              </a:rPr>
-              <a:t>•  frida-trace -U -i "recv" -f &lt;paquete&gt;     # traza funciones que empiezan por recv</a:t>
-            </a:r>
-          </a:p>
-          <a:p>
-            <a:pPr>
-              <a:spcAft>
-                <a:spcPts val="600"/>
-              </a:spcAft>
-            </a:pPr>
-            <a:r>
-              <a:rPr sz="1500">
-                <a:solidFill>
-                  <a:srgbClr val="22282E"/>
-                </a:solidFill>
-              </a:rPr>
-              <a:t>•  frida -U -l script.js -f &lt;paquete&gt;         # inyecta un script propio</a:t>
-            </a:r>
-          </a:p>
-          <a:p>
-            <a:pPr>
-              <a:spcAft>
-                <a:spcPts val="600"/>
-              </a:spcAft>
-            </a:pPr>
-            <a:r>
-              <a:rPr sz="1500">
-                <a:solidFill>
-                  <a:srgbClr val="22282E"/>
-                </a:solidFill>
-              </a:rPr>
-              <a:t>•  apktool b out -o mod.apk</a:t>
-            </a:r>
-          </a:p>
-          <a:p>
-            <a:pPr>
-              <a:spcAft>
-                <a:spcPts val="600"/>
-              </a:spcAft>
-            </a:pPr>
-            <a:r>
-              <a:rPr sz="1500">
-                <a:solidFill>
-                  <a:srgbClr val="22282E"/>
-                </a:solidFill>
-              </a:rPr>
-              <a:t>•  apksigner sign --ks mykey.jks mod.apk</a:t>
+              <a:t>•  Término — Definición útil</a:t>
+            </a:r>
+          </a:p>
+          <a:p>
+            <a:pPr>
+              <a:spcAft>
+                <a:spcPts val="600"/>
+              </a:spcAft>
+            </a:pPr>
+            <a:r>
+              <a:rPr sz="1500">
+                <a:solidFill>
+                  <a:srgbClr val="22282E"/>
+                </a:solidFill>
+              </a:rPr>
+              <a:t>•  DEX — Bytecode ejecutado por Android Runtime.</a:t>
+            </a:r>
+          </a:p>
+          <a:p>
+            <a:pPr>
+              <a:spcAft>
+                <a:spcPts val="600"/>
+              </a:spcAft>
+            </a:pPr>
+            <a:r>
+              <a:rPr sz="1500">
+                <a:solidFill>
+                  <a:srgbClr val="22282E"/>
+                </a:solidFill>
+              </a:rPr>
+              <a:t>•  Mach-O — Formato de ejecutables de plataformas Apple.</a:t>
+            </a:r>
+          </a:p>
+          <a:p>
+            <a:pPr>
+              <a:spcAft>
+                <a:spcPts val="600"/>
+              </a:spcAft>
+            </a:pPr>
+            <a:r>
+              <a:rPr sz="1500">
+                <a:solidFill>
+                  <a:srgbClr val="22282E"/>
+                </a:solidFill>
+              </a:rPr>
+              <a:t>•  JNI/bridge — Interfaz entre código gestionado y nativo.</a:t>
+            </a:r>
+          </a:p>
+          <a:p>
+            <a:pPr>
+              <a:spcAft>
+                <a:spcPts val="600"/>
+              </a:spcAft>
+            </a:pPr>
+            <a:r>
+              <a:rPr sz="1500">
+                <a:solidFill>
+                  <a:srgbClr val="22282E"/>
+                </a:solidFill>
+              </a:rPr>
+              <a:t>•  Referencia cruzada — Relación entre uso y definición en un binario.</a:t>
+            </a:r>
+          </a:p>
+          <a:p>
+            <a:pPr>
+              <a:spcAft>
+                <a:spcPts val="600"/>
+              </a:spcAft>
+            </a:pPr>
+            <a:r>
+              <a:rPr sz="1500">
+                <a:solidFill>
+                  <a:srgbClr val="22282E"/>
+                </a:solidFill>
+              </a:rPr>
+              <a:t>•  Reempaquetado — Reconstrucción y firma de una copia autorizada para laboratorio.</a:t>
             </a:r>
           </a:p>
         </p:txBody>
@@ -4420,7 +4721,7 @@
                   <a:srgbClr val="0B3D2E"/>
                 </a:solidFill>
               </a:rPr>
-              <a:t>🧪 Laboratorio guiado</a:t>
+              <a:t>✅ Criterio de dominio</a:t>
             </a:r>
           </a:p>
         </p:txBody>
@@ -4458,97 +4759,7 @@
                   <a:srgbClr val="22282E"/>
                 </a:solidFill>
               </a:rPr>
-              <a:t>•  Elige un objetivo legítimo: un CrackMe de Android/iOS o una app propia con un "secreto" a recuperar.</a:t>
-            </a:r>
-          </a:p>
-          <a:p>
-            <a:pPr>
-              <a:spcAft>
-                <a:spcPts val="600"/>
-              </a:spcAft>
-            </a:pPr>
-            <a:r>
-              <a:rPr sz="1500">
-                <a:solidFill>
-                  <a:srgbClr val="22282E"/>
-                </a:solidFill>
-              </a:rPr>
-              <a:t>•  Decompila: ábrela en jadx y localiza la clase/método que valida el secreto o realiza la lógica de interés.</a:t>
-            </a:r>
-          </a:p>
-          <a:p>
-            <a:pPr>
-              <a:spcAft>
-                <a:spcPts val="600"/>
-              </a:spcAft>
-            </a:pPr>
-            <a:r>
-              <a:rPr sz="1500">
-                <a:solidFill>
-                  <a:srgbClr val="22282E"/>
-                </a:solidFill>
-              </a:rPr>
-              <a:t>•  Analiza el nativo: si la lógica está en un .so, cárgalo en Ghidra y estudia la función exportada relevante.</a:t>
-            </a:r>
-          </a:p>
-          <a:p>
-            <a:pPr>
-              <a:spcAft>
-                <a:spcPts val="600"/>
-              </a:spcAft>
-            </a:pPr>
-            <a:r>
-              <a:rPr sz="1500">
-                <a:solidFill>
-                  <a:srgbClr val="22282E"/>
-                </a:solidFill>
-              </a:rPr>
-              <a:t>•  Instrumenta con Frida: hookea la función de validación, registra sus argumentos y su valor de retorno.</a:t>
-            </a:r>
-          </a:p>
-          <a:p>
-            <a:pPr>
-              <a:spcAft>
-                <a:spcPts val="600"/>
-              </a:spcAft>
-            </a:pPr>
-            <a:r>
-              <a:rPr sz="1500">
-                <a:solidFill>
-                  <a:srgbClr val="22282E"/>
-                </a:solidFill>
-              </a:rPr>
-              <a:t>•  Modifica el retorno: cambia el resultado de la función (p. ej. forzar true) y observa el cambio de comportamiento.</a:t>
-            </a:r>
-          </a:p>
-          <a:p>
-            <a:pPr>
-              <a:spcAft>
-                <a:spcPts val="600"/>
-              </a:spcAft>
-            </a:pPr>
-            <a:r>
-              <a:rPr sz="1500">
-                <a:solidFill>
-                  <a:srgbClr val="22282E"/>
-                </a:solidFill>
-              </a:rPr>
-              <a:t>•  Evalúa anti-tampering: si la app comprueba su firma, localiza el check y neutralízalo con un hook.</a:t>
-            </a:r>
-          </a:p>
-          <a:p>
-            <a:pPr>
-              <a:spcAft>
-                <a:spcPts val="600"/>
-              </a:spcAft>
-            </a:pPr>
-            <a:r>
-              <a:rPr sz="1500">
-                <a:solidFill>
-                  <a:srgbClr val="22282E"/>
-                </a:solidFill>
-              </a:rPr>
-              <a:t>•  Parchea estáticamente: edita el smali correspondiente, recompila con apktool, firma con tu clave e instala la app modificada.</a:t>
+              <a:t>•  El alumno domina RE móvil cuando conserva el artefacto, cruza capas gestionada y nativa, formula hipótesis desde flujos, las valida dinámicamente y calibra el impacto sin confundir nombres u…</a:t>
             </a:r>
           </a:p>
         </p:txBody>
@@ -4599,7 +4810,7 @@
                   <a:srgbClr val="0B3D2E"/>
                 </a:solidFill>
               </a:rPr>
-              <a:t>✍️ Ejercicios</a:t>
+              <a:t>📖 Definiciones y características</a:t>
             </a:r>
           </a:p>
         </p:txBody>
@@ -4637,82 +4848,82 @@
                   <a:srgbClr val="22282E"/>
                 </a:solidFill>
               </a:rPr>
-              <a:t>•  Resuelve un CrackMe de Android recuperando el secreto solo con análisis estático.</a:t>
-            </a:r>
-          </a:p>
-          <a:p>
-            <a:pPr>
-              <a:spcAft>
-                <a:spcPts val="600"/>
-              </a:spcAft>
-            </a:pPr>
-            <a:r>
-              <a:rPr sz="1500">
-                <a:solidFill>
-                  <a:srgbClr val="22282E"/>
-                </a:solidFill>
-              </a:rPr>
-              <a:t>•  Escribe un script Frida que imprima los argumentos de una función de cifrado.</a:t>
-            </a:r>
-          </a:p>
-          <a:p>
-            <a:pPr>
-              <a:spcAft>
-                <a:spcPts val="600"/>
-              </a:spcAft>
-            </a:pPr>
-            <a:r>
-              <a:rPr sz="1500">
-                <a:solidFill>
-                  <a:srgbClr val="22282E"/>
-                </a:solidFill>
-              </a:rPr>
-              <a:t>•  Localiza en Ghidra una función nativa y renómbrala/anota según su propósito.</a:t>
-            </a:r>
-          </a:p>
-          <a:p>
-            <a:pPr>
-              <a:spcAft>
-                <a:spcPts val="600"/>
-              </a:spcAft>
-            </a:pPr>
-            <a:r>
-              <a:rPr sz="1500">
-                <a:solidFill>
-                  <a:srgbClr val="22282E"/>
-                </a:solidFill>
-              </a:rPr>
-              <a:t>•  Evade un check de detección de debugger con un hook.</a:t>
-            </a:r>
-          </a:p>
-          <a:p>
-            <a:pPr>
-              <a:spcAft>
-                <a:spcPts val="600"/>
-              </a:spcAft>
-            </a:pPr>
-            <a:r>
-              <a:rPr sz="1500">
-                <a:solidFill>
-                  <a:srgbClr val="22282E"/>
-                </a:solidFill>
-              </a:rPr>
-              <a:t>•  Parchea una condición en smali y demuestra el nuevo comportamiento.</a:t>
-            </a:r>
-          </a:p>
-          <a:p>
-            <a:pPr>
-              <a:spcAft>
-                <a:spcPts val="600"/>
-              </a:spcAft>
-            </a:pPr>
-            <a:r>
-              <a:rPr sz="1500">
-                <a:solidFill>
-                  <a:srgbClr val="22282E"/>
-                </a:solidFill>
-              </a:rPr>
-              <a:t>•  Compara el esfuerzo de resolver el reto por vía estática vs. dinámica.</a:t>
+              <a:t>•  DEX (Dalvik Executable): bytecode de Android; se desensambla a smali y se decompila a Java aproximado. Característica: legible con jadx.</a:t>
+            </a:r>
+          </a:p>
+          <a:p>
+            <a:pPr>
+              <a:spcAft>
+                <a:spcPts val="600"/>
+              </a:spcAft>
+            </a:pPr>
+            <a:r>
+              <a:rPr sz="1500">
+                <a:solidFill>
+                  <a:srgbClr val="22282E"/>
+                </a:solidFill>
+              </a:rPr>
+              <a:t>•  Ghidra: suite de RE de la NSA para binarios nativos con decompilador a C. Característica: gratuita y potente para ARM/.so/Mach-O.</a:t>
+            </a:r>
+          </a:p>
+          <a:p>
+            <a:pPr>
+              <a:spcAft>
+                <a:spcPts val="600"/>
+              </a:spcAft>
+            </a:pPr>
+            <a:r>
+              <a:rPr sz="1500">
+                <a:solidFill>
+                  <a:srgbClr val="22282E"/>
+                </a:solidFill>
+              </a:rPr>
+              <a:t>•  frida-trace: genera handlers automáticos para funciones y registra sus llamadas. Característica: descubre el flujo sin leer todo el código.</a:t>
+            </a:r>
+          </a:p>
+          <a:p>
+            <a:pPr>
+              <a:spcAft>
+                <a:spcPts val="600"/>
+              </a:spcAft>
+            </a:pPr>
+            <a:r>
+              <a:rPr sz="1500">
+                <a:solidFill>
+                  <a:srgbClr val="22282E"/>
+                </a:solidFill>
+              </a:rPr>
+              <a:t>•  Ofuscación: transformación que dificulta la lectura (renombrado, control-flow flattening, cadenas cifradas). Característica: aumenta el coste, no lo impide.</a:t>
+            </a:r>
+          </a:p>
+          <a:p>
+            <a:pPr>
+              <a:spcAft>
+                <a:spcPts val="600"/>
+              </a:spcAft>
+            </a:pPr>
+            <a:r>
+              <a:rPr sz="1500">
+                <a:solidFill>
+                  <a:srgbClr val="22282E"/>
+                </a:solidFill>
+              </a:rPr>
+              <a:t>•  Anti-tampering: comprobaciones de integridad (firma, checksums) que detectan modificación. Característica: se evaden hookeando el check.</a:t>
+            </a:r>
+          </a:p>
+          <a:p>
+            <a:pPr>
+              <a:spcAft>
+                <a:spcPts val="600"/>
+              </a:spcAft>
+            </a:pPr>
+            <a:r>
+              <a:rPr sz="1500">
+                <a:solidFill>
+                  <a:srgbClr val="22282E"/>
+                </a:solidFill>
+              </a:rPr>
+              <a:t>•  Reempaquetado: recompilar una app modificada y volver a firmarla. Característica: requiere una clave de firma propia.</a:t>
             </a:r>
           </a:p>
         </p:txBody>
@@ -4763,7 +4974,7 @@
                   <a:srgbClr val="0B3D2E"/>
                 </a:solidFill>
               </a:rPr>
-              <a:t>📝 Reto verificable</a:t>
+              <a:t>🧪 Laboratorio guiado</a:t>
             </a:r>
           </a:p>
         </p:txBody>
@@ -4801,7 +5012,97 @@
                   <a:srgbClr val="22282E"/>
                 </a:solidFill>
               </a:rPr>
-              <a:t>•  Toma un CrackMe móvil y recupera su secreto/flag por dos vías independientes: una estática (leyendo/parcheando el código) y una dinámica (hook con Frida). Criterio de aceptación: documentas ambos métodos con evidencia (captura del flag y el script/parche usado) y explicas cuál fue más eficiente y por qué.</a:t>
+              <a:t>•  Elige un objetivo legítimo: un CrackMe de Android/iOS o una app propia con un "secreto" a recuperar.</a:t>
+            </a:r>
+          </a:p>
+          <a:p>
+            <a:pPr>
+              <a:spcAft>
+                <a:spcPts val="600"/>
+              </a:spcAft>
+            </a:pPr>
+            <a:r>
+              <a:rPr sz="1500">
+                <a:solidFill>
+                  <a:srgbClr val="22282E"/>
+                </a:solidFill>
+              </a:rPr>
+              <a:t>•  Decompila: ábrela en jadx y localiza la clase/método que valida el secreto o realiza la lógica de interés.</a:t>
+            </a:r>
+          </a:p>
+          <a:p>
+            <a:pPr>
+              <a:spcAft>
+                <a:spcPts val="600"/>
+              </a:spcAft>
+            </a:pPr>
+            <a:r>
+              <a:rPr sz="1500">
+                <a:solidFill>
+                  <a:srgbClr val="22282E"/>
+                </a:solidFill>
+              </a:rPr>
+              <a:t>•  Analiza el nativo: si la lógica está en un .so, cárgalo en Ghidra y estudia la función exportada relevante.</a:t>
+            </a:r>
+          </a:p>
+          <a:p>
+            <a:pPr>
+              <a:spcAft>
+                <a:spcPts val="600"/>
+              </a:spcAft>
+            </a:pPr>
+            <a:r>
+              <a:rPr sz="1500">
+                <a:solidFill>
+                  <a:srgbClr val="22282E"/>
+                </a:solidFill>
+              </a:rPr>
+              <a:t>•  Instrumenta con Frida: hookea la función de validación, registra sus argumentos y su valor de retorno.</a:t>
+            </a:r>
+          </a:p>
+          <a:p>
+            <a:pPr>
+              <a:spcAft>
+                <a:spcPts val="600"/>
+              </a:spcAft>
+            </a:pPr>
+            <a:r>
+              <a:rPr sz="1500">
+                <a:solidFill>
+                  <a:srgbClr val="22282E"/>
+                </a:solidFill>
+              </a:rPr>
+              <a:t>•  Modifica el retorno: cambia el resultado de la función (p. ej. forzar true) y observa el cambio de comportamiento.</a:t>
+            </a:r>
+          </a:p>
+          <a:p>
+            <a:pPr>
+              <a:spcAft>
+                <a:spcPts val="600"/>
+              </a:spcAft>
+            </a:pPr>
+            <a:r>
+              <a:rPr sz="1500">
+                <a:solidFill>
+                  <a:srgbClr val="22282E"/>
+                </a:solidFill>
+              </a:rPr>
+              <a:t>•  Evalúa anti-tampering: si la app comprueba su firma, localiza el check y neutralízalo con un hook.</a:t>
+            </a:r>
+          </a:p>
+          <a:p>
+            <a:pPr>
+              <a:spcAft>
+                <a:spcPts val="600"/>
+              </a:spcAft>
+            </a:pPr>
+            <a:r>
+              <a:rPr sz="1500">
+                <a:solidFill>
+                  <a:srgbClr val="22282E"/>
+                </a:solidFill>
+              </a:rPr>
+              <a:t>•  Parchea estáticamente: edita el smali correspondiente, recompila con apktool, firma con tu clave e instala la app modificada.</a:t>
             </a:r>
           </a:p>
         </p:txBody>
